--- a/docs/slides/pptx/M2-finding.pptx
+++ b/docs/slides/pptx/M2-finding.pptx
@@ -2759,7 +2759,7 @@
               <a:t>trail-embeddings.json</a:t>
             </a:r>
             <a:r>
-              <a:t> = 04's vectors, precomputed · </a:t>
+              <a:t> = precomputed vectors for this 30-trail slice (not 04's full set) · </a:t>
             </a:r>
             <a:r>
               <a:rPr>

--- a/docs/slides/pptx/M2-finding.pptx
+++ b/docs/slides/pptx/M2-finding.pptx
@@ -172,7 +172,7 @@
   <pc:docChgLst>
     <pc:chgData name="J. Tower" userId="9d06de10716639e5" providerId="LiveId" clId="{F8931099-75CA-5660-A155-55881DF68D84}"/>
     <pc:docChg chg="undo redo custSel addSld delSld modSld sldOrd modSection">
-      <pc:chgData name="J. Tower" userId="9d06de10716639e5" providerId="LiveId" clId="{F8931099-75CA-5660-A155-55881DF68D84}" dt="2026-09-16T13:41:30.984" v="1229" actId="20577"/>
+      <pc:chgData name="J. Tower" userId="9d06de10716639e5" providerId="LiveId" clId="{F8931099-75CA-5660-A155-55881DF68D84}" dt="2026-09-16T14:37:33.956" v="1235" actId="20577"/>
       <pc:docMkLst>
         <pc:docMk/>
       </pc:docMkLst>
@@ -452,6 +452,36 @@
           </ac:spMkLst>
         </pc:spChg>
       </pc:sldChg>
+      <pc:sldChg chg="modSp mod">
+        <pc:chgData name="J. Tower" userId="9d06de10716639e5" providerId="LiveId" clId="{F8931099-75CA-5660-A155-55881DF68D84}" dt="2026-09-16T14:37:06.010" v="1234" actId="20577"/>
+        <pc:sldMkLst>
+          <pc:docMk/>
+          <pc:sldMk cId="0" sldId="616"/>
+        </pc:sldMkLst>
+        <pc:spChg chg="mod">
+          <ac:chgData name="J. Tower" userId="9d06de10716639e5" providerId="LiveId" clId="{F8931099-75CA-5660-A155-55881DF68D84}" dt="2026-09-16T14:37:06.010" v="1234" actId="20577"/>
+          <ac:spMkLst>
+            <pc:docMk/>
+            <pc:sldMk cId="0" sldId="616"/>
+            <ac:spMk id="3" creationId="{00000000-0000-0000-0000-000000000000}"/>
+          </ac:spMkLst>
+        </pc:spChg>
+      </pc:sldChg>
+      <pc:sldChg chg="modSp mod">
+        <pc:chgData name="J. Tower" userId="9d06de10716639e5" providerId="LiveId" clId="{F8931099-75CA-5660-A155-55881DF68D84}" dt="2026-09-16T14:37:33.956" v="1235" actId="20577"/>
+        <pc:sldMkLst>
+          <pc:docMk/>
+          <pc:sldMk cId="0" sldId="618"/>
+        </pc:sldMkLst>
+        <pc:spChg chg="mod">
+          <ac:chgData name="J. Tower" userId="9d06de10716639e5" providerId="LiveId" clId="{F8931099-75CA-5660-A155-55881DF68D84}" dt="2026-09-16T14:37:33.956" v="1235" actId="20577"/>
+          <ac:spMkLst>
+            <pc:docMk/>
+            <pc:sldMk cId="0" sldId="618"/>
+            <ac:spMk id="3" creationId="{00000000-0000-0000-0000-000000000000}"/>
+          </ac:spMkLst>
+        </pc:spChg>
+      </pc:sldChg>
     </pc:docChg>
   </pc:docChgLst>
 </pc:chgInfo>
@@ -2730,10 +2760,11 @@
           <a:lstStyle/>
           <a:p>
             <a:r>
+              <a:rPr dirty="0"/>
               <a:t>~6 min · </a:t>
             </a:r>
             <a:r>
-              <a:rPr>
+              <a:rPr dirty="0">
                 <a:latin typeface="Consolas"/>
               </a:rPr>
               <a:t>cd modules/M2-finding/F06-recommendations/dotnet</a:t>
@@ -2741,113 +2772,151 @@
           </a:p>
           <a:p>
             <a:r>
+              <a:rPr dirty="0"/>
               <a:t>Files: </a:t>
             </a:r>
             <a:r>
-              <a:rPr>
+              <a:rPr dirty="0" err="1">
                 <a:latin typeface="Consolas"/>
               </a:rPr>
               <a:t>trails.json</a:t>
             </a:r>
             <a:r>
+              <a:rPr dirty="0"/>
               <a:t> = 30 trails · </a:t>
             </a:r>
             <a:r>
-              <a:rPr>
+              <a:rPr dirty="0">
                 <a:latin typeface="Consolas"/>
               </a:rPr>
-              <a:t>trail-embeddings.json</a:t>
-            </a:r>
-            <a:r>
-              <a:t> = precomputed vectors for this 30-trail slice (not 04's full set) · </a:t>
-            </a:r>
-            <a:r>
-              <a:rPr>
+              <a:t>trail-</a:t>
+            </a:r>
+            <a:r>
+              <a:rPr dirty="0" err="1">
                 <a:latin typeface="Consolas"/>
               </a:rPr>
-              <a:t>gear-reviews.jsonl</a:t>
-            </a:r>
-            <a:r>
+              <a:t>embeddings.json</a:t>
+            </a:r>
+            <a:r>
+              <a:rPr dirty="0"/>
+              <a:t> = 04's vectors, precomputed · </a:t>
+            </a:r>
+            <a:r>
+              <a:rPr dirty="0">
+                <a:latin typeface="Consolas"/>
+              </a:rPr>
+              <a:t>gear-</a:t>
+            </a:r>
+            <a:r>
+              <a:rPr dirty="0" err="1">
+                <a:latin typeface="Consolas"/>
+              </a:rPr>
+              <a:t>reviews.jsonl</a:t>
+            </a:r>
+            <a:r>
+              <a:rPr dirty="0"/>
               <a:t> = 300 reviews</a:t>
             </a:r>
           </a:p>
           <a:p>
             <a:r>
-              <a:t>Args: a trail id or name (default trail-0117, Avalanche Lake) · </a:t>
-            </a:r>
-            <a:r>
-              <a:rPr>
+              <a:rPr dirty="0" err="1"/>
+              <a:t>Args</a:t>
+            </a:r>
+            <a:r>
+              <a:rPr dirty="0"/>
+              <a:t>: a trail id or name (default trail-0117, Avalanche Lake) · </a:t>
+            </a:r>
+            <a:r>
+              <a:rPr dirty="0">
                 <a:latin typeface="Consolas"/>
               </a:rPr>
               <a:t>--gear &lt;product&gt;</a:t>
             </a:r>
             <a:r>
+              <a:rPr dirty="0"/>
               <a:t> = same trick over review text</a:t>
             </a:r>
           </a:p>
           <a:p>
             <a:r>
+              <a:rPr dirty="0"/>
               <a:t>1. Avalanche Lake Trail page. What belongs at the bottom of this screen?</a:t>
             </a:r>
           </a:p>
           <a:p>
             <a:r>
+              <a:rPr dirty="0"/>
               <a:t>2. Before: </a:t>
             </a:r>
             <a:r>
-              <a:rPr>
+              <a:rPr dirty="0">
                 <a:latin typeface="Consolas"/>
               </a:rPr>
               <a:t>cd starter &amp;&amp; dotnet run</a:t>
             </a:r>
             <a:r>
+              <a:rPr dirty="0"/>
               <a:t>. Random picks. That is what most apps ship.</a:t>
             </a:r>
           </a:p>
           <a:p>
             <a:r>
+              <a:rPr dirty="0"/>
               <a:t>3. After: </a:t>
             </a:r>
             <a:r>
-              <a:rPr>
+              <a:rPr dirty="0">
                 <a:latin typeface="Consolas"/>
               </a:rPr>
               <a:t>cd ../complete &amp;&amp; dotnet run</a:t>
             </a:r>
             <a:r>
+              <a:rPr dirty="0"/>
               <a:t>. Same vectors as 04, nothing new embedded. Lakes cluster, but mostly hard, and one has no lake.</a:t>
             </a:r>
           </a:p>
           <a:p>
             <a:r>
+              <a:rPr dirty="0"/>
               <a:t>4. Difficulty and park are in the catalog, not the text. Similarity gets candidates; metadata re-ranks.</a:t>
             </a:r>
           </a:p>
           <a:p>
             <a:r>
+              <a:rPr dirty="0"/>
               <a:t>5. </a:t>
             </a:r>
             <a:r>
-              <a:rPr>
+              <a:rPr dirty="0">
                 <a:latin typeface="Consolas"/>
               </a:rPr>
               <a:t>dotnet run -- --gear Cascade 65</a:t>
             </a:r>
             <a:r>
+              <a:rPr dirty="0"/>
               <a:t>: the Cascade 40. Substitutes, not complements. What people use with it lives in the reviews: the bear canister, in </a:t>
             </a:r>
             <a:r>
-              <a:rPr>
+              <a:rPr dirty="0">
                 <a:latin typeface="Consolas"/>
               </a:rPr>
-              <a:t>expected-output.md</a:t>
-            </a:r>
-            <a:r>
+              <a:t>expected-</a:t>
+            </a:r>
+            <a:r>
+              <a:rPr dirty="0" err="1">
+                <a:latin typeface="Consolas"/>
+              </a:rPr>
+              <a:t>output.md</a:t>
+            </a:r>
+            <a:r>
+              <a:rPr dirty="0"/>
               <a:t>.</a:t>
             </a:r>
           </a:p>
           <a:p>
             <a:r>
+              <a:rPr dirty="0"/>
               <a:t>Cut: 5.</a:t>
             </a:r>
           </a:p>
@@ -16222,11 +16291,11 @@
               </a:spcAft>
             </a:pPr>
             <a:r>
-              <a:rPr sz="2800" b="1"/>
+              <a:rPr sz="2800" b="1" dirty="0"/>
               <a:t>When:</a:t>
             </a:r>
             <a:r>
-              <a:rPr sz="2800"/>
+              <a:rPr sz="2800" dirty="0"/>
               <a:t> Users finish one thing and the product offers no next step.</a:t>
             </a:r>
           </a:p>
@@ -16237,12 +16306,20 @@
               </a:spcAft>
             </a:pPr>
             <a:r>
-              <a:rPr sz="2800" b="1"/>
+              <a:rPr sz="2800" b="1" dirty="0"/>
               <a:t>Think:</a:t>
             </a:r>
             <a:r>
-              <a:rPr sz="2800"/>
-              <a:t> "The same vectors that power our search give us 'more like this' for free."</a:t>
+              <a:rPr sz="2800" dirty="0"/>
+              <a:t> "The same vectors that power our search give </a:t>
+            </a:r>
+            <a:r>
+              <a:rPr lang="en-US" sz="2800" dirty="0"/>
+              <a:t>us</a:t>
+            </a:r>
+            <a:r>
+              <a:rPr sz="2800" dirty="0"/>
+              <a:t> 'more like this' for free."</a:t>
             </a:r>
           </a:p>
           <a:p>
@@ -16251,7 +16328,7 @@
                 <a:spcPts val="1400"/>
               </a:spcAft>
             </a:pPr>
-            <a:endParaRPr sz="2800"/>
+            <a:endParaRPr sz="2800" dirty="0"/>
           </a:p>
           <a:p>
             <a:pPr>
@@ -16260,11 +16337,11 @@
               </a:spcAft>
             </a:pPr>
             <a:r>
-              <a:rPr sz="2800" b="1"/>
+              <a:rPr sz="2800" b="1" dirty="0"/>
               <a:t>Difficulty:</a:t>
             </a:r>
             <a:r>
-              <a:rPr sz="2800"/>
+              <a:rPr sz="2800" dirty="0"/>
               <a:t> </a:t>
             </a:r>
           </a:p>
@@ -16662,12 +16739,12 @@
           <a:bodyPr wrap="square"/>
           <a:lstStyle/>
           <a:p>
-            <a:endParaRPr/>
-          </a:p>
-          <a:p>
-            <a:r>
-              <a:rPr sz="2800"/>
-              <a:t>How'd it go?				  Observations?			        Questions?</a:t>
+            <a:endParaRPr dirty="0"/>
+          </a:p>
+          <a:p>
+            <a:r>
+              <a:rPr sz="2800" dirty="0"/>
+              <a:t>How'd it go?			  Observations?			        Questions?</a:t>
             </a:r>
           </a:p>
         </p:txBody>

--- a/docs/slides/pptx/M2-finding.pptx
+++ b/docs/slides/pptx/M2-finding.pptx
@@ -1522,7 +1522,7 @@
           <a:lstStyle/>
           <a:p>
             <a:r>
-              <a:t>The user problem, spoken, 60 seconds: "Can I have a campfire at Sperry Chalet in September?" The answer exists — paragraph four of a 12-page regulations document nobody will read. Search returns the document, not the answer; a plain chatbot answers fluently and makes it up, and a confidently wrong answer about fire rules is worse than no answer.</a:t>
+              <a:t>The user problem, spoken, 60 seconds: "Can I have a campfire at Sperry Chalet in September?" The answer exists: paragraph four of a 12-page regulations document nobody will read. Search returns the document, not the answer; a plain chatbot answers fluently and makes it up, and a confidently wrong answer about fire rules is worse than no answer.</a:t>
             </a:r>
           </a:p>
         </p:txBody>
@@ -2620,7 +2620,7 @@
           </a:p>
           <a:p>
             <a:r>
-              <a:t>No concept slide: the Same First Half diagram already told this story — same vectors, same similarity code, the query swapped for an item, no model call while the user waits.</a:t>
+              <a:t>No concept slide: the Same First Half diagram already told this story: same vectors, same similarity code, the query swapped for an item, no model call while the user waits.</a:t>
             </a:r>
           </a:p>
         </p:txBody>
@@ -3267,7 +3267,7 @@
           <a:lstStyle/>
           <a:p>
             <a:r>
-              <a:t>04: embed 30 trails, embed a query, rank by cosine; keyword baseline provided. Two honest routes: if RAG is why you came, go straight to 05 and come back to 04 after — nobody should leave having never built the thing they came for. 06 is 04's code with the query swapped for an item.</a:t>
+              <a:t>04: embed 30 trails, embed a query, rank by cosine; keyword baseline provided. Two honest routes: if RAG is why you came, go straight to 05 and come back to 04 after. Nobody should leave having never built the thing they came for. 06 is 04's code with the query swapped for an item.</a:t>
             </a:r>
           </a:p>
           <a:p>
@@ -3347,7 +3347,7 @@
           </a:p>
           <a:p>
             <a:r>
-              <a:t>Prompts if quiet: who got Taft Point for the kids query? Who got the Cascade 40? Rows 4–6 of the framework are done. Lunch, then Module 3.</a:t>
+              <a:t>Prompts if quiet: who got Taft Point for the kids query? Who got the Cascade 40? Rows 4-6 of the framework are done. Lunch, then Module 3.</a:t>
             </a:r>
           </a:p>
         </p:txBody>
@@ -3508,7 +3508,7 @@
           <a:lstStyle/>
           <a:p>
             <a:r>
-              <a:t>The user problem, spoken, 60 seconds: "dog-friendly waterfall hike, not too steep." The catalog has a dozen matches and keyword search returns almost nothing, because no description says "not too steep" — the best trail says "a gentle grade shaded by cedars." Three bad results and the user goes back to asking strangers on Reddit.</a:t>
+              <a:t>The user problem, spoken, 60 seconds: "dog-friendly waterfall hike, not too steep." The catalog has a dozen matches and keyword search returns almost nothing, because no description says "not too steep"; the best trail says "a gentle grade shaded by cedars." Three bad results and the user goes back to asking strangers on Reddit.</a:t>
             </a:r>
           </a:p>
         </p:txBody>
@@ -14906,7 +14906,7 @@
           <a:p>
             <a:r>
               <a:rPr sz="2400"/>
-              <a:t>Citations are strings — validate the ids</a:t>
+              <a:t>Citations are strings: validate the ids</a:t>
             </a:r>
           </a:p>
           <a:p>
@@ -16023,7 +16023,7 @@
           <a:p>
             <a:r>
               <a:rPr sz="2800"/>
-              <a:t>Lakes cluster — but mostly hard, and one has no lake</a:t>
+              <a:t>Lakes cluster, but mostly hard, and one has no lake</a:t>
             </a:r>
           </a:p>
           <a:p>
@@ -16584,91 +16584,56 @@
           <a:bodyPr wrap="square"/>
           <a:lstStyle/>
           <a:p>
-            <a:r>
-              <a:rPr sz="3600"/>
+            <a:pPr marL="0" indent="0">
+              <a:buNone/>
+            </a:pPr>
+            <a:r>
+              <a:rPr sz="3600" dirty="0"/>
               <a:t>⭐ Recommended: </a:t>
             </a:r>
-            <a:r>
-              <a:rPr sz="3600" b="1"/>
+            <a:endParaRPr lang="en-US" sz="3600" dirty="0"/>
+          </a:p>
+          <a:p>
+            <a:pPr marL="0" indent="0">
+              <a:buNone/>
+            </a:pPr>
+            <a:r>
+              <a:rPr sz="3600" b="1" dirty="0"/>
               <a:t>F04 Semantic Search</a:t>
             </a:r>
-          </a:p>
-          <a:p>
-            <a:r>
-              <a:rPr sz="3600"/>
+            <a:endParaRPr lang="en-US" sz="3600" b="1" dirty="0"/>
+          </a:p>
+          <a:p>
+            <a:pPr marL="0" indent="0">
+              <a:buNone/>
+            </a:pPr>
+            <a:endParaRPr sz="3600" b="1" dirty="0"/>
+          </a:p>
+          <a:p>
+            <a:pPr marL="0" indent="0">
+              <a:buNone/>
+            </a:pPr>
+            <a:r>
+              <a:rPr sz="3600" dirty="0"/>
               <a:t>⛰️ Challenge: </a:t>
             </a:r>
-            <a:r>
-              <a:rPr sz="3600" b="1"/>
+            <a:endParaRPr lang="en-US" sz="3600" dirty="0"/>
+          </a:p>
+          <a:p>
+            <a:pPr marL="0" indent="0">
+              <a:buNone/>
+            </a:pPr>
+            <a:r>
+              <a:rPr sz="3600" b="1" dirty="0"/>
               <a:t>F05 RAG</a:t>
             </a:r>
             <a:r>
-              <a:rPr sz="3600"/>
+              <a:rPr sz="3600" dirty="0"/>
               <a:t> (☁️ room key) · </a:t>
             </a:r>
             <a:r>
-              <a:rPr sz="3600" b="1"/>
+              <a:rPr sz="3600" b="1" dirty="0"/>
               <a:t>F06 Recommendations</a:t>
-            </a:r>
-          </a:p>
-          <a:p>
-            <a:r>
-              <a:rPr sz="2800">
-                <a:latin typeface="Consolas"/>
-              </a:rPr>
-              <a:t>FNN-lab.md</a:t>
-            </a:r>
-            <a:r>
-              <a:rPr sz="2800"/>
-              <a:t> · </a:t>
-            </a:r>
-            <a:r>
-              <a:rPr sz="2800">
-                <a:latin typeface="Consolas"/>
-              </a:rPr>
-              <a:t>http/</a:t>
-            </a:r>
-            <a:r>
-              <a:rPr sz="2800"/>
-              <a:t> · </a:t>
-            </a:r>
-            <a:r>
-              <a:rPr sz="2800">
-                <a:latin typeface="Consolas"/>
-              </a:rPr>
-              <a:t>expected-output.md</a:t>
-            </a:r>
-            <a:r>
-              <a:rPr sz="2800"/>
-              <a:t> · </a:t>
-            </a:r>
-            <a:r>
-              <a:rPr sz="2800">
-                <a:latin typeface="Consolas"/>
-              </a:rPr>
-              <a:t>data/</a:t>
-            </a:r>
-          </a:p>
-          <a:p>
-            <a:endParaRPr sz="2800">
-              <a:latin typeface="Consolas"/>
-            </a:endParaRPr>
-          </a:p>
-          <a:p>
-            <a:endParaRPr sz="2800">
-              <a:latin typeface="Consolas"/>
-            </a:endParaRPr>
-          </a:p>
-          <a:p>
-            <a:r>
-              <a:rPr sz="3200"/>
-              <a:t>✅ Done = your output similar to </a:t>
-            </a:r>
-            <a:r>
-              <a:rPr sz="3200">
-                <a:latin typeface="Consolas"/>
-              </a:rPr>
-              <a:t>expected-output.md</a:t>
             </a:r>
           </a:p>
         </p:txBody>
